--- a/Amit_VOIS_Seasonal_Agriculture_Performance_Analysis_PPT.pptx
+++ b/Amit_VOIS_Seasonal_Agriculture_Performance_Analysis_PPT.pptx
@@ -263,7 +263,7 @@
           <a:p>
             <a:fld id="{EF1077DB-935E-4A0A-947A-D283B9F9F452}" type="datetimeFigureOut">
               <a:rPr lang="en-US" smtClean="0"/>
-              <a:t>9/10/2026</a:t>
+              <a:t>9/15/2026</a:t>
             </a:fld>
             <a:endParaRPr lang="en-US" dirty="0"/>
           </a:p>
@@ -440,7 +440,7 @@
           <a:p>
             <a:fld id="{2D9EC30E-1A71-4188-9BE7-E2A64929A436}" type="datetimeFigureOut">
               <a:rPr lang="en-US" noProof="0" smtClean="0"/>
-              <a:t>9/10/2026</a:t>
+              <a:t>9/15/2026</a:t>
             </a:fld>
             <a:endParaRPr lang="en-US" noProof="0" dirty="0"/>
           </a:p>
@@ -1537,7 +1537,7 @@
             <a:fld id="{B61BEF0D-F0BB-DE4B-95CE-6DB70DBA9567}" type="datetimeFigureOut">
               <a:rPr lang="en-US" smtClean="0"/>
               <a:pPr/>
-              <a:t>9/10/2026</a:t>
+              <a:t>9/15/2026</a:t>
             </a:fld>
             <a:endParaRPr lang="en-US" dirty="0"/>
           </a:p>
@@ -1791,7 +1791,7 @@
             <a:fld id="{B61BEF0D-F0BB-DE4B-95CE-6DB70DBA9567}" type="datetimeFigureOut">
               <a:rPr lang="en-US" smtClean="0"/>
               <a:pPr/>
-              <a:t>9/10/2026</a:t>
+              <a:t>9/15/2026</a:t>
             </a:fld>
             <a:endParaRPr lang="en-US" dirty="0"/>
           </a:p>
@@ -2108,7 +2108,7 @@
             <a:fld id="{B61BEF0D-F0BB-DE4B-95CE-6DB70DBA9567}" type="datetimeFigureOut">
               <a:rPr lang="en-US" smtClean="0"/>
               <a:pPr/>
-              <a:t>9/10/2026</a:t>
+              <a:t>9/15/2026</a:t>
             </a:fld>
             <a:endParaRPr lang="en-US" dirty="0"/>
           </a:p>
@@ -2444,7 +2444,7 @@
             <a:fld id="{B61BEF0D-F0BB-DE4B-95CE-6DB70DBA9567}" type="datetimeFigureOut">
               <a:rPr lang="en-US" smtClean="0"/>
               <a:pPr/>
-              <a:t>9/10/2026</a:t>
+              <a:t>9/15/2026</a:t>
             </a:fld>
             <a:endParaRPr lang="en-US" dirty="0"/>
           </a:p>
@@ -2761,7 +2761,7 @@
             <a:fld id="{B61BEF0D-F0BB-DE4B-95CE-6DB70DBA9567}" type="datetimeFigureOut">
               <a:rPr lang="en-US" smtClean="0"/>
               <a:pPr/>
-              <a:t>9/10/2026</a:t>
+              <a:t>9/15/2026</a:t>
             </a:fld>
             <a:endParaRPr lang="en-US" dirty="0"/>
           </a:p>
@@ -3157,7 +3157,7 @@
             <a:fld id="{B61BEF0D-F0BB-DE4B-95CE-6DB70DBA9567}" type="datetimeFigureOut">
               <a:rPr lang="en-US" smtClean="0"/>
               <a:pPr/>
-              <a:t>9/10/2026</a:t>
+              <a:t>9/15/2026</a:t>
             </a:fld>
             <a:endParaRPr lang="en-US" dirty="0"/>
           </a:p>
@@ -3329,7 +3329,7 @@
           <a:p>
             <a:fld id="{55C6B4A9-1611-4792-9094-5F34BCA07E0B}" type="datetimeFigureOut">
               <a:rPr lang="en-US" smtClean="0"/>
-              <a:t>9/10/2026</a:t>
+              <a:t>9/15/2026</a:t>
             </a:fld>
             <a:endParaRPr lang="en-US" dirty="0"/>
           </a:p>
@@ -3511,7 +3511,7 @@
             <a:fld id="{B61BEF0D-F0BB-DE4B-95CE-6DB70DBA9567}" type="datetimeFigureOut">
               <a:rPr lang="en-US" smtClean="0"/>
               <a:pPr/>
-              <a:t>9/10/2026</a:t>
+              <a:t>9/15/2026</a:t>
             </a:fld>
             <a:endParaRPr lang="en-US" dirty="0"/>
           </a:p>
@@ -5240,7 +5240,7 @@
             <a:fld id="{B61BEF0D-F0BB-DE4B-95CE-6DB70DBA9567}" type="datetimeFigureOut">
               <a:rPr lang="en-US" smtClean="0"/>
               <a:pPr/>
-              <a:t>9/10/2026</a:t>
+              <a:t>9/15/2026</a:t>
             </a:fld>
             <a:endParaRPr lang="en-US" dirty="0"/>
           </a:p>
@@ -6975,7 +6975,7 @@
             <a:fld id="{B61BEF0D-F0BB-DE4B-95CE-6DB70DBA9567}" type="datetimeFigureOut">
               <a:rPr lang="en-US" smtClean="0"/>
               <a:pPr/>
-              <a:t>9/10/2026</a:t>
+              <a:t>9/15/2026</a:t>
             </a:fld>
             <a:endParaRPr lang="en-US" dirty="0"/>
           </a:p>
@@ -7209,7 +7209,7 @@
           <a:p>
             <a:fld id="{EB712588-04B1-427B-82EE-E8DB90309F08}" type="datetimeFigureOut">
               <a:rPr lang="en-US" smtClean="0"/>
-              <a:t>9/10/2026</a:t>
+              <a:t>9/15/2026</a:t>
             </a:fld>
             <a:endParaRPr lang="en-US" dirty="0"/>
           </a:p>
@@ -7585,7 +7585,7 @@
             <a:fld id="{B61BEF0D-F0BB-DE4B-95CE-6DB70DBA9567}" type="datetimeFigureOut">
               <a:rPr lang="en-US" smtClean="0"/>
               <a:pPr/>
-              <a:t>9/10/2026</a:t>
+              <a:t>9/15/2026</a:t>
             </a:fld>
             <a:endParaRPr lang="en-US" dirty="0"/>
           </a:p>
@@ -7711,7 +7711,7 @@
             <a:fld id="{B61BEF0D-F0BB-DE4B-95CE-6DB70DBA9567}" type="datetimeFigureOut">
               <a:rPr lang="en-US" smtClean="0"/>
               <a:pPr/>
-              <a:t>9/10/2026</a:t>
+              <a:t>9/15/2026</a:t>
             </a:fld>
             <a:endParaRPr lang="en-US" dirty="0"/>
           </a:p>
@@ -7809,7 +7809,7 @@
             <a:fld id="{B61BEF0D-F0BB-DE4B-95CE-6DB70DBA9567}" type="datetimeFigureOut">
               <a:rPr lang="en-US" smtClean="0"/>
               <a:pPr/>
-              <a:t>9/10/2026</a:t>
+              <a:t>9/15/2026</a:t>
             </a:fld>
             <a:endParaRPr lang="en-US" dirty="0"/>
           </a:p>
@@ -8066,7 +8066,7 @@
           <a:p>
             <a:fld id="{42A54C80-263E-416B-A8E0-580EDEADCBDC}" type="datetimeFigureOut">
               <a:rPr lang="en-US" smtClean="0"/>
-              <a:t>9/10/2026</a:t>
+              <a:t>9/15/2026</a:t>
             </a:fld>
             <a:endParaRPr lang="en-US" dirty="0"/>
           </a:p>
@@ -8374,7 +8374,7 @@
             <a:fld id="{B61BEF0D-F0BB-DE4B-95CE-6DB70DBA9567}" type="datetimeFigureOut">
               <a:rPr lang="en-US" smtClean="0"/>
               <a:pPr/>
-              <a:t>9/10/2026</a:t>
+              <a:t>9/15/2026</a:t>
             </a:fld>
             <a:endParaRPr lang="en-US" dirty="0"/>
           </a:p>
@@ -9078,7 +9078,7 @@
             <a:fld id="{B61BEF0D-F0BB-DE4B-95CE-6DB70DBA9567}" type="datetimeFigureOut">
               <a:rPr lang="en-US" smtClean="0"/>
               <a:pPr/>
-              <a:t>9/10/2026</a:t>
+              <a:t>9/15/2026</a:t>
             </a:fld>
             <a:endParaRPr lang="en-US" dirty="0"/>
           </a:p>
@@ -9289,7 +9289,7 @@
                 </a:solidFill>
               </a:rPr>
               <a:pPr/>
-              <a:t>9/10/2026</a:t>
+              <a:t>9/15/2026</a:t>
             </a:fld>
             <a:endParaRPr lang="en-US" sz="1100" dirty="0">
               <a:solidFill>
@@ -10122,6 +10122,7 @@
               </a:defRPr>
             </a:pPr>
             <a:r>
+              <a:rPr dirty="0"/>
               <a:t>Seasonal Agriculture Performance Analysis</a:t>
             </a:r>
             <a:endParaRPr lang="en-IN" sz="3200" dirty="0"/>
@@ -14832,10 +14833,10 @@
       </p:sp>
       <p:pic>
         <p:nvPicPr>
-          <p:cNvPr id="6" name="Picture 5">
+          <p:cNvPr id="3" name="Picture 2">
             <a:extLst>
               <a:ext uri="{FF2B5EF4-FFF2-40B4-BE49-F238E27FC236}">
-                <a16:creationId xmlns:a16="http://schemas.microsoft.com/office/drawing/2014/main" id="{8A66D268-96D2-F39A-84CE-25ADA63FBC81}"/>
+                <a16:creationId xmlns:a16="http://schemas.microsoft.com/office/drawing/2014/main" id="{D97D02C9-648D-D530-AB10-C67336BD8141}"/>
               </a:ext>
             </a:extLst>
           </p:cNvPr>
@@ -14852,8 +14853,8 @@
         </p:blipFill>
         <p:spPr>
           <a:xfrm>
-            <a:off x="502136" y="1508397"/>
-            <a:ext cx="6032497" cy="4277321"/>
+            <a:off x="675957" y="1275371"/>
+            <a:ext cx="6844038" cy="4857485"/>
           </a:xfrm>
           <a:prstGeom prst="rect">
             <a:avLst/>
@@ -22810,7 +22811,7 @@
         </p:nvSpPr>
         <p:spPr>
           <a:xfrm>
-            <a:off x="6720840" y="1645920"/>
+            <a:off x="6492240" y="2057400"/>
             <a:ext cx="3474720" cy="3474720"/>
           </a:xfrm>
           <a:prstGeom prst="rect">
@@ -22830,6 +22831,7 @@
               </a:defRPr>
             </a:pPr>
             <a:r>
+              <a:rPr dirty="0"/>
               <a:t>Kharif had the highest average yield (5.64 t/ha) and highest average profit (₹178,915). Zaid showed the lowest average profit (₹-24,805).</a:t>
             </a:r>
           </a:p>
@@ -24154,15 +24156,6 @@
 </file>
 
 <file path=customXml/item1.xml><?xml version="1.0" encoding="utf-8"?>
-<p:properties xmlns:p="http://schemas.microsoft.com/office/2006/metadata/properties" xmlns:xsi="http://www.w3.org/2001/XMLSchema-instance" xmlns:pc="http://schemas.microsoft.com/office/infopath/2007/PartnerControls">
-  <documentManagement>
-    <Status xmlns="71af3243-3dd4-4a8d-8c0d-dd76da1f02a5">Not started</Status>
-    <MediaServiceKeyPoints xmlns="71af3243-3dd4-4a8d-8c0d-dd76da1f02a5" xsi:nil="true"/>
-  </documentManagement>
-</p:properties>
-</file>
-
-<file path=customXml/item2.xml><?xml version="1.0" encoding="utf-8"?>
 <ct:contentTypeSchema xmlns:ct="http://schemas.microsoft.com/office/2006/metadata/contentType" xmlns:ma="http://schemas.microsoft.com/office/2006/metadata/properties/metaAttributes" ct:_="" ma:_="" ma:contentTypeName="Document" ma:contentTypeID="0x01010079F111ED35F8CC479449609E8A0923A6" ma:contentTypeVersion="12" ma:contentTypeDescription="Create a new document." ma:contentTypeScope="" ma:versionID="426e97fa315356fffbdcd9876fe988c2">
   <xsd:schema xmlns:xsd="http://www.w3.org/2001/XMLSchema" xmlns:xs="http://www.w3.org/2001/XMLSchema" xmlns:p="http://schemas.microsoft.com/office/2006/metadata/properties" xmlns:ns2="71af3243-3dd4-4a8d-8c0d-dd76da1f02a5" xmlns:ns3="16c05727-aa75-4e4a-9b5f-8a80a1165891" targetNamespace="http://schemas.microsoft.com/office/2006/metadata/properties" ma:root="true" ma:fieldsID="14b8f0def80e6d70ce3def20c90759ae" ns2:_="" ns3:_="">
     <xsd:import namespace="71af3243-3dd4-4a8d-8c0d-dd76da1f02a5"/>
@@ -24383,6 +24376,15 @@
 </ct:contentTypeSchema>
 </file>
 
+<file path=customXml/item2.xml><?xml version="1.0" encoding="utf-8"?>
+<p:properties xmlns:p="http://schemas.microsoft.com/office/2006/metadata/properties" xmlns:xsi="http://www.w3.org/2001/XMLSchema-instance" xmlns:pc="http://schemas.microsoft.com/office/infopath/2007/PartnerControls">
+  <documentManagement>
+    <Status xmlns="71af3243-3dd4-4a8d-8c0d-dd76da1f02a5">Not started</Status>
+    <MediaServiceKeyPoints xmlns="71af3243-3dd4-4a8d-8c0d-dd76da1f02a5" xsi:nil="true"/>
+  </documentManagement>
+</p:properties>
+</file>
+
 <file path=customXml/item3.xml><?xml version="1.0" encoding="utf-8"?>
 <?mso-contentType ?>
 <FormTemplates xmlns="http://schemas.microsoft.com/sharepoint/v3/contenttype/forms">
@@ -24393,16 +24395,6 @@
 </file>
 
 <file path=customXml/itemProps1.xml><?xml version="1.0" encoding="utf-8"?>
-<ds:datastoreItem xmlns:ds="http://schemas.openxmlformats.org/officeDocument/2006/customXml" ds:itemID="{4DEA9014-ED64-4558-B1E1-D03F0EE32BEB}">
-  <ds:schemaRefs>
-    <ds:schemaRef ds:uri="http://schemas.microsoft.com/office/2006/metadata/properties"/>
-    <ds:schemaRef ds:uri="http://schemas.microsoft.com/office/infopath/2007/PartnerControls"/>
-    <ds:schemaRef ds:uri="71af3243-3dd4-4a8d-8c0d-dd76da1f02a5"/>
-  </ds:schemaRefs>
-</ds:datastoreItem>
-</file>
-
-<file path=customXml/itemProps2.xml><?xml version="1.0" encoding="utf-8"?>
 <ds:datastoreItem xmlns:ds="http://schemas.openxmlformats.org/officeDocument/2006/customXml" ds:itemID="{B19EB750-A6DA-4BE8-B87B-FC499FE73360}">
   <ds:schemaRefs>
     <ds:schemaRef ds:uri="http://schemas.microsoft.com/office/2006/metadata/contentType"/>
@@ -24421,6 +24413,16 @@
 </ds:datastoreItem>
 </file>
 
+<file path=customXml/itemProps2.xml><?xml version="1.0" encoding="utf-8"?>
+<ds:datastoreItem xmlns:ds="http://schemas.openxmlformats.org/officeDocument/2006/customXml" ds:itemID="{4DEA9014-ED64-4558-B1E1-D03F0EE32BEB}">
+  <ds:schemaRefs>
+    <ds:schemaRef ds:uri="http://schemas.microsoft.com/office/2006/metadata/properties"/>
+    <ds:schemaRef ds:uri="http://schemas.microsoft.com/office/infopath/2007/PartnerControls"/>
+    <ds:schemaRef ds:uri="71af3243-3dd4-4a8d-8c0d-dd76da1f02a5"/>
+  </ds:schemaRefs>
+</ds:datastoreItem>
+</file>
+
 <file path=customXml/itemProps3.xml><?xml version="1.0" encoding="utf-8"?>
 <ds:datastoreItem xmlns:ds="http://schemas.openxmlformats.org/officeDocument/2006/customXml" ds:itemID="{05D99ABA-76CE-4A8E-B5F0-C051B96628DE}">
   <ds:schemaRefs>
